--- a/lectures/20260723-worklife-ax-workshop/output/worklife-ax-workshop.pptx
+++ b/lectures/20260723-worklife-ax-workshop/output/worklife-ax-workshop.pptx
@@ -24420,52 +24420,35 @@
           </a:p>
         </p:txBody>
       </p:sp>
-      <p:sp>
-        <p:nvSpPr>
-          <p:cNvPr id="5" name="Rectangle 4"/>
-          <p:cNvSpPr/>
-          <p:nvPr/>
-        </p:nvSpPr>
-        <p:spPr>
-          <a:xfrm>
-            <a:off x="548640" y="1600200"/>
-            <a:ext cx="11094415" cy="4160520"/>
+      <p:pic>
+        <p:nvPicPr>
+          <p:cNvPr id="5" name="Picture 4" descr="free_02_new_chat.png"/>
+          <p:cNvPicPr>
+            <a:picLocks noChangeAspect="1"/>
+          </p:cNvPicPr>
+          <p:nvPr/>
+        </p:nvPicPr>
+        <p:blipFill>
+          <a:blip r:embed="rId2"/>
+          <a:stretch>
+            <a:fillRect/>
+          </a:stretch>
+        </p:blipFill>
+        <p:spPr>
+          <a:xfrm>
+            <a:off x="2448268" y="1600200"/>
+            <a:ext cx="7295158" cy="4160520"/>
           </a:xfrm>
           <a:prstGeom prst="rect">
             <a:avLst/>
           </a:prstGeom>
-          <a:solidFill>
-            <a:srgbClr val="F7F8FA"/>
-          </a:solidFill>
           <a:ln w="9525">
             <a:solidFill>
               <a:srgbClr val="E5E7EB"/>
             </a:solidFill>
           </a:ln>
-          <a:effectLst/>
-        </p:spPr>
-        <p:style>
-          <a:lnRef idx="1">
-            <a:schemeClr val="accent1"/>
-          </a:lnRef>
-          <a:fillRef idx="3">
-            <a:schemeClr val="accent1"/>
-          </a:fillRef>
-          <a:effectRef idx="2">
-            <a:schemeClr val="accent1"/>
-          </a:effectRef>
-          <a:fontRef idx="minor">
-            <a:schemeClr val="lt1"/>
-          </a:fontRef>
-        </p:style>
-        <p:txBody>
-          <a:bodyPr rtlCol="0" anchor="ctr"/>
-          <a:lstStyle/>
-          <a:p>
-            <a:pPr algn="ctr"/>
-          </a:p>
-        </p:txBody>
-      </p:sp>
+        </p:spPr>
+      </p:pic>
       <p:sp>
         <p:nvSpPr>
           <p:cNvPr id="6" name="TextBox 5"/>
@@ -24474,7 +24457,7 @@
         </p:nvSpPr>
         <p:spPr>
           <a:xfrm>
-            <a:off x="548640" y="3154680"/>
+            <a:off x="548640" y="5897880"/>
             <a:ext cx="11094415" cy="457200"/>
           </a:xfrm>
           <a:prstGeom prst="rect">
@@ -24494,13 +24477,13 @@
               </a:lnSpc>
             </a:pPr>
             <a:r>
-              <a:rPr sz="1700" b="1" i="0">
+              <a:rPr sz="1500" b="0" i="0">
                 <a:solidFill>
                   <a:srgbClr val="333333"/>
                 </a:solidFill>
                 <a:latin typeface="Apple SD Gothic Neo"/>
               </a:rPr>
-              <a:t>스크린샷 자리 — assets/screenshots/free_02_new_chat.png</a:t>
+              <a:t>로그인 후 첫 화면 — 아래 입력창에 붙여넣고 Enter, 오늘 실습의 전부입니다</a:t>
             </a:r>
           </a:p>
         </p:txBody>
@@ -24513,8 +24496,8 @@
         </p:nvSpPr>
         <p:spPr>
           <a:xfrm>
-            <a:off x="548640" y="3703320"/>
-            <a:ext cx="11094415" cy="457200"/>
+            <a:off x="548640" y="6492240"/>
+            <a:ext cx="7315200" cy="274320"/>
           </a:xfrm>
           <a:prstGeom prst="rect">
             <a:avLst/>
@@ -24527,7 +24510,7 @@
           </a:bodyPr>
           <a:lstStyle/>
           <a:p>
-            <a:pPr algn="ctr">
+            <a:pPr algn="l">
               <a:lnSpc>
                 <a:spcPct val="115000"/>
               </a:lnSpc>
@@ -24539,7 +24522,7 @@
                 </a:solidFill>
                 <a:latin typeface="Apple SD Gothic Neo"/>
               </a:rPr>
-              <a:t>파일 저장 후 python3 build_pptx/build.py 재실행하면 자동 삽입됩니다</a:t>
+              <a:t>AI 시대의 업무 경쟁력과 생산성 향상 · 2026 청년 여성 밸런스 워크숍</a:t>
             </a:r>
           </a:p>
         </p:txBody>
@@ -24547,84 +24530,6 @@
       <p:sp>
         <p:nvSpPr>
           <p:cNvPr id="8" name="TextBox 7"/>
-          <p:cNvSpPr txBox="1"/>
-          <p:nvPr/>
-        </p:nvSpPr>
-        <p:spPr>
-          <a:xfrm>
-            <a:off x="548640" y="5897880"/>
-            <a:ext cx="11094415" cy="457200"/>
-          </a:xfrm>
-          <a:prstGeom prst="rect">
-            <a:avLst/>
-          </a:prstGeom>
-          <a:noFill/>
-        </p:spPr>
-        <p:txBody>
-          <a:bodyPr wrap="square" lIns="0" rIns="0" tIns="0" bIns="0" anchor="t">
-            <a:spAutoFit/>
-          </a:bodyPr>
-          <a:lstStyle/>
-          <a:p>
-            <a:pPr algn="ctr">
-              <a:lnSpc>
-                <a:spcPct val="115000"/>
-              </a:lnSpc>
-            </a:pPr>
-            <a:r>
-              <a:rPr sz="1500" b="0" i="0">
-                <a:solidFill>
-                  <a:srgbClr val="333333"/>
-                </a:solidFill>
-                <a:latin typeface="Apple SD Gothic Neo"/>
-              </a:rPr>
-              <a:t>로그인 후 첫 화면 — 아래 입력창에 붙여넣고 Enter, 오늘 실습의 전부입니다</a:t>
-            </a:r>
-          </a:p>
-        </p:txBody>
-      </p:sp>
-      <p:sp>
-        <p:nvSpPr>
-          <p:cNvPr id="9" name="TextBox 8"/>
-          <p:cNvSpPr txBox="1"/>
-          <p:nvPr/>
-        </p:nvSpPr>
-        <p:spPr>
-          <a:xfrm>
-            <a:off x="548640" y="6492240"/>
-            <a:ext cx="7315200" cy="274320"/>
-          </a:xfrm>
-          <a:prstGeom prst="rect">
-            <a:avLst/>
-          </a:prstGeom>
-          <a:noFill/>
-        </p:spPr>
-        <p:txBody>
-          <a:bodyPr wrap="square" lIns="0" rIns="0" tIns="0" bIns="0" anchor="t">
-            <a:spAutoFit/>
-          </a:bodyPr>
-          <a:lstStyle/>
-          <a:p>
-            <a:pPr algn="l">
-              <a:lnSpc>
-                <a:spcPct val="115000"/>
-              </a:lnSpc>
-            </a:pPr>
-            <a:r>
-              <a:rPr sz="1200" b="0" i="0">
-                <a:solidFill>
-                  <a:srgbClr val="333333"/>
-                </a:solidFill>
-                <a:latin typeface="Apple SD Gothic Neo"/>
-              </a:rPr>
-              <a:t>AI 시대의 업무 경쟁력과 생산성 향상 · 2026 청년 여성 밸런스 워크숍</a:t>
-            </a:r>
-          </a:p>
-        </p:txBody>
-      </p:sp>
-      <p:sp>
-        <p:nvSpPr>
-          <p:cNvPr id="10" name="TextBox 9"/>
           <p:cNvSpPr txBox="1"/>
           <p:nvPr/>
         </p:nvSpPr>
@@ -28973,52 +28878,35 @@
           </a:p>
         </p:txBody>
       </p:sp>
-      <p:sp>
-        <p:nvSpPr>
-          <p:cNvPr id="5" name="Rectangle 4"/>
-          <p:cNvSpPr/>
-          <p:nvPr/>
-        </p:nvSpPr>
-        <p:spPr>
-          <a:xfrm>
-            <a:off x="548640" y="1600200"/>
-            <a:ext cx="11094415" cy="4160520"/>
+      <p:pic>
+        <p:nvPicPr>
+          <p:cNvPr id="5" name="Picture 4" descr="free_03_meeting_result.png"/>
+          <p:cNvPicPr>
+            <a:picLocks noChangeAspect="1"/>
+          </p:cNvPicPr>
+          <p:nvPr/>
+        </p:nvPicPr>
+        <p:blipFill>
+          <a:blip r:embed="rId2"/>
+          <a:stretch>
+            <a:fillRect/>
+          </a:stretch>
+        </p:blipFill>
+        <p:spPr>
+          <a:xfrm>
+            <a:off x="2448268" y="1600200"/>
+            <a:ext cx="7295158" cy="4160519"/>
           </a:xfrm>
           <a:prstGeom prst="rect">
             <a:avLst/>
           </a:prstGeom>
-          <a:solidFill>
-            <a:srgbClr val="F7F8FA"/>
-          </a:solidFill>
           <a:ln w="9525">
             <a:solidFill>
               <a:srgbClr val="E5E7EB"/>
             </a:solidFill>
           </a:ln>
-          <a:effectLst/>
-        </p:spPr>
-        <p:style>
-          <a:lnRef idx="1">
-            <a:schemeClr val="accent1"/>
-          </a:lnRef>
-          <a:fillRef idx="3">
-            <a:schemeClr val="accent1"/>
-          </a:fillRef>
-          <a:effectRef idx="2">
-            <a:schemeClr val="accent1"/>
-          </a:effectRef>
-          <a:fontRef idx="minor">
-            <a:schemeClr val="lt1"/>
-          </a:fontRef>
-        </p:style>
-        <p:txBody>
-          <a:bodyPr rtlCol="0" anchor="ctr"/>
-          <a:lstStyle/>
-          <a:p>
-            <a:pPr algn="ctr"/>
-          </a:p>
-        </p:txBody>
-      </p:sp>
+        </p:spPr>
+      </p:pic>
       <p:sp>
         <p:nvSpPr>
           <p:cNvPr id="6" name="TextBox 5"/>
@@ -29027,7 +28915,7 @@
         </p:nvSpPr>
         <p:spPr>
           <a:xfrm>
-            <a:off x="548640" y="3154680"/>
+            <a:off x="548640" y="5897880"/>
             <a:ext cx="11094415" cy="457200"/>
           </a:xfrm>
           <a:prstGeom prst="rect">
@@ -29047,13 +28935,13 @@
               </a:lnSpc>
             </a:pPr>
             <a:r>
-              <a:rPr sz="1700" b="1" i="0">
+              <a:rPr sz="1500" b="0" i="0">
                 <a:solidFill>
                   <a:srgbClr val="333333"/>
                 </a:solidFill>
                 <a:latin typeface="Apple SD Gothic Neo"/>
               </a:rPr>
-              <a:t>스크린샷 자리 — assets/screenshots/free_03_meeting_result.png</a:t>
+              <a:t>무료 계정에서 실제로 나온 회의록 정리 결과 — 여러분 화면과 비교해 보세요</a:t>
             </a:r>
           </a:p>
         </p:txBody>
@@ -29066,8 +28954,8 @@
         </p:nvSpPr>
         <p:spPr>
           <a:xfrm>
-            <a:off x="548640" y="3703320"/>
-            <a:ext cx="11094415" cy="457200"/>
+            <a:off x="548640" y="6492240"/>
+            <a:ext cx="7315200" cy="274320"/>
           </a:xfrm>
           <a:prstGeom prst="rect">
             <a:avLst/>
@@ -29080,7 +28968,7 @@
           </a:bodyPr>
           <a:lstStyle/>
           <a:p>
-            <a:pPr algn="ctr">
+            <a:pPr algn="l">
               <a:lnSpc>
                 <a:spcPct val="115000"/>
               </a:lnSpc>
@@ -29092,7 +28980,7 @@
                 </a:solidFill>
                 <a:latin typeface="Apple SD Gothic Neo"/>
               </a:rPr>
-              <a:t>파일 저장 후 python3 build_pptx/build.py 재실행하면 자동 삽입됩니다</a:t>
+              <a:t>AI 시대의 업무 경쟁력과 생산성 향상 · 2026 청년 여성 밸런스 워크숍</a:t>
             </a:r>
           </a:p>
         </p:txBody>
@@ -29100,84 +28988,6 @@
       <p:sp>
         <p:nvSpPr>
           <p:cNvPr id="8" name="TextBox 7"/>
-          <p:cNvSpPr txBox="1"/>
-          <p:nvPr/>
-        </p:nvSpPr>
-        <p:spPr>
-          <a:xfrm>
-            <a:off x="548640" y="5897880"/>
-            <a:ext cx="11094415" cy="457200"/>
-          </a:xfrm>
-          <a:prstGeom prst="rect">
-            <a:avLst/>
-          </a:prstGeom>
-          <a:noFill/>
-        </p:spPr>
-        <p:txBody>
-          <a:bodyPr wrap="square" lIns="0" rIns="0" tIns="0" bIns="0" anchor="t">
-            <a:spAutoFit/>
-          </a:bodyPr>
-          <a:lstStyle/>
-          <a:p>
-            <a:pPr algn="ctr">
-              <a:lnSpc>
-                <a:spcPct val="115000"/>
-              </a:lnSpc>
-            </a:pPr>
-            <a:r>
-              <a:rPr sz="1500" b="0" i="0">
-                <a:solidFill>
-                  <a:srgbClr val="333333"/>
-                </a:solidFill>
-                <a:latin typeface="Apple SD Gothic Neo"/>
-              </a:rPr>
-              <a:t>무료 계정에서 실제로 나온 회의록 정리 결과 — 여러분 화면과 비교해 보세요</a:t>
-            </a:r>
-          </a:p>
-        </p:txBody>
-      </p:sp>
-      <p:sp>
-        <p:nvSpPr>
-          <p:cNvPr id="9" name="TextBox 8"/>
-          <p:cNvSpPr txBox="1"/>
-          <p:nvPr/>
-        </p:nvSpPr>
-        <p:spPr>
-          <a:xfrm>
-            <a:off x="548640" y="6492240"/>
-            <a:ext cx="7315200" cy="274320"/>
-          </a:xfrm>
-          <a:prstGeom prst="rect">
-            <a:avLst/>
-          </a:prstGeom>
-          <a:noFill/>
-        </p:spPr>
-        <p:txBody>
-          <a:bodyPr wrap="square" lIns="0" rIns="0" tIns="0" bIns="0" anchor="t">
-            <a:spAutoFit/>
-          </a:bodyPr>
-          <a:lstStyle/>
-          <a:p>
-            <a:pPr algn="l">
-              <a:lnSpc>
-                <a:spcPct val="115000"/>
-              </a:lnSpc>
-            </a:pPr>
-            <a:r>
-              <a:rPr sz="1200" b="0" i="0">
-                <a:solidFill>
-                  <a:srgbClr val="333333"/>
-                </a:solidFill>
-                <a:latin typeface="Apple SD Gothic Neo"/>
-              </a:rPr>
-              <a:t>AI 시대의 업무 경쟁력과 생산성 향상 · 2026 청년 여성 밸런스 워크숍</a:t>
-            </a:r>
-          </a:p>
-        </p:txBody>
-      </p:sp>
-      <p:sp>
-        <p:nvSpPr>
-          <p:cNvPr id="10" name="TextBox 9"/>
           <p:cNvSpPr txBox="1"/>
           <p:nvPr/>
         </p:nvSpPr>
@@ -29821,52 +29631,35 @@
           </a:p>
         </p:txBody>
       </p:sp>
-      <p:sp>
-        <p:nvSpPr>
-          <p:cNvPr id="5" name="Rectangle 4"/>
-          <p:cNvSpPr/>
-          <p:nvPr/>
-        </p:nvSpPr>
-        <p:spPr>
-          <a:xfrm>
-            <a:off x="548640" y="1600200"/>
-            <a:ext cx="11094415" cy="4160520"/>
+      <p:pic>
+        <p:nvPicPr>
+          <p:cNvPr id="5" name="Picture 4" descr="free_04_markdown_table.png"/>
+          <p:cNvPicPr>
+            <a:picLocks noChangeAspect="1"/>
+          </p:cNvPicPr>
+          <p:nvPr/>
+        </p:nvPicPr>
+        <p:blipFill>
+          <a:blip r:embed="rId2"/>
+          <a:stretch>
+            <a:fillRect/>
+          </a:stretch>
+        </p:blipFill>
+        <p:spPr>
+          <a:xfrm>
+            <a:off x="2467487" y="1600200"/>
+            <a:ext cx="7256720" cy="4160520"/>
           </a:xfrm>
           <a:prstGeom prst="rect">
             <a:avLst/>
           </a:prstGeom>
-          <a:solidFill>
-            <a:srgbClr val="F7F8FA"/>
-          </a:solidFill>
           <a:ln w="9525">
             <a:solidFill>
               <a:srgbClr val="E5E7EB"/>
             </a:solidFill>
           </a:ln>
-          <a:effectLst/>
-        </p:spPr>
-        <p:style>
-          <a:lnRef idx="1">
-            <a:schemeClr val="accent1"/>
-          </a:lnRef>
-          <a:fillRef idx="3">
-            <a:schemeClr val="accent1"/>
-          </a:fillRef>
-          <a:effectRef idx="2">
-            <a:schemeClr val="accent1"/>
-          </a:effectRef>
-          <a:fontRef idx="minor">
-            <a:schemeClr val="lt1"/>
-          </a:fontRef>
-        </p:style>
-        <p:txBody>
-          <a:bodyPr rtlCol="0" anchor="ctr"/>
-          <a:lstStyle/>
-          <a:p>
-            <a:pPr algn="ctr"/>
-          </a:p>
-        </p:txBody>
-      </p:sp>
+        </p:spPr>
+      </p:pic>
       <p:sp>
         <p:nvSpPr>
           <p:cNvPr id="6" name="TextBox 5"/>
@@ -29875,7 +29668,7 @@
         </p:nvSpPr>
         <p:spPr>
           <a:xfrm>
-            <a:off x="548640" y="3154680"/>
+            <a:off x="548640" y="5897880"/>
             <a:ext cx="11094415" cy="457200"/>
           </a:xfrm>
           <a:prstGeom prst="rect">
@@ -29895,13 +29688,13 @@
               </a:lnSpc>
             </a:pPr>
             <a:r>
-              <a:rPr sz="1700" b="1" i="0">
+              <a:rPr sz="1500" b="0" i="0">
                 <a:solidFill>
                   <a:srgbClr val="333333"/>
                 </a:solidFill>
                 <a:latin typeface="Apple SD Gothic Neo"/>
               </a:rPr>
-              <a:t>스크린샷 자리 — assets/screenshots/free_04_markdown_table.png</a:t>
+              <a:t>Claude의 Markdown 표를 Notion에 붙여넣으면 이렇게 표로 살아납니다</a:t>
             </a:r>
           </a:p>
         </p:txBody>
@@ -29914,8 +29707,8 @@
         </p:nvSpPr>
         <p:spPr>
           <a:xfrm>
-            <a:off x="548640" y="3703320"/>
-            <a:ext cx="11094415" cy="457200"/>
+            <a:off x="548640" y="6492240"/>
+            <a:ext cx="7315200" cy="274320"/>
           </a:xfrm>
           <a:prstGeom prst="rect">
             <a:avLst/>
@@ -29928,7 +29721,7 @@
           </a:bodyPr>
           <a:lstStyle/>
           <a:p>
-            <a:pPr algn="ctr">
+            <a:pPr algn="l">
               <a:lnSpc>
                 <a:spcPct val="115000"/>
               </a:lnSpc>
@@ -29940,7 +29733,7 @@
                 </a:solidFill>
                 <a:latin typeface="Apple SD Gothic Neo"/>
               </a:rPr>
-              <a:t>파일 저장 후 python3 build_pptx/build.py 재실행하면 자동 삽입됩니다</a:t>
+              <a:t>AI 시대의 업무 경쟁력과 생산성 향상 · 2026 청년 여성 밸런스 워크숍</a:t>
             </a:r>
           </a:p>
         </p:txBody>
@@ -29948,84 +29741,6 @@
       <p:sp>
         <p:nvSpPr>
           <p:cNvPr id="8" name="TextBox 7"/>
-          <p:cNvSpPr txBox="1"/>
-          <p:nvPr/>
-        </p:nvSpPr>
-        <p:spPr>
-          <a:xfrm>
-            <a:off x="548640" y="5897880"/>
-            <a:ext cx="11094415" cy="457200"/>
-          </a:xfrm>
-          <a:prstGeom prst="rect">
-            <a:avLst/>
-          </a:prstGeom>
-          <a:noFill/>
-        </p:spPr>
-        <p:txBody>
-          <a:bodyPr wrap="square" lIns="0" rIns="0" tIns="0" bIns="0" anchor="t">
-            <a:spAutoFit/>
-          </a:bodyPr>
-          <a:lstStyle/>
-          <a:p>
-            <a:pPr algn="ctr">
-              <a:lnSpc>
-                <a:spcPct val="115000"/>
-              </a:lnSpc>
-            </a:pPr>
-            <a:r>
-              <a:rPr sz="1500" b="0" i="0">
-                <a:solidFill>
-                  <a:srgbClr val="333333"/>
-                </a:solidFill>
-                <a:latin typeface="Apple SD Gothic Neo"/>
-              </a:rPr>
-              <a:t>Claude의 Markdown 표를 Notion에 붙여넣으면 이렇게 표로 살아납니다</a:t>
-            </a:r>
-          </a:p>
-        </p:txBody>
-      </p:sp>
-      <p:sp>
-        <p:nvSpPr>
-          <p:cNvPr id="9" name="TextBox 8"/>
-          <p:cNvSpPr txBox="1"/>
-          <p:nvPr/>
-        </p:nvSpPr>
-        <p:spPr>
-          <a:xfrm>
-            <a:off x="548640" y="6492240"/>
-            <a:ext cx="7315200" cy="274320"/>
-          </a:xfrm>
-          <a:prstGeom prst="rect">
-            <a:avLst/>
-          </a:prstGeom>
-          <a:noFill/>
-        </p:spPr>
-        <p:txBody>
-          <a:bodyPr wrap="square" lIns="0" rIns="0" tIns="0" bIns="0" anchor="t">
-            <a:spAutoFit/>
-          </a:bodyPr>
-          <a:lstStyle/>
-          <a:p>
-            <a:pPr algn="l">
-              <a:lnSpc>
-                <a:spcPct val="115000"/>
-              </a:lnSpc>
-            </a:pPr>
-            <a:r>
-              <a:rPr sz="1200" b="0" i="0">
-                <a:solidFill>
-                  <a:srgbClr val="333333"/>
-                </a:solidFill>
-                <a:latin typeface="Apple SD Gothic Neo"/>
-              </a:rPr>
-              <a:t>AI 시대의 업무 경쟁력과 생산성 향상 · 2026 청년 여성 밸런스 워크숍</a:t>
-            </a:r>
-          </a:p>
-        </p:txBody>
-      </p:sp>
-      <p:sp>
-        <p:nvSpPr>
-          <p:cNvPr id="10" name="TextBox 9"/>
           <p:cNvSpPr txBox="1"/>
           <p:nvPr/>
         </p:nvSpPr>
@@ -32846,52 +32561,35 @@
           </a:p>
         </p:txBody>
       </p:sp>
-      <p:sp>
-        <p:nvSpPr>
-          <p:cNvPr id="5" name="Rectangle 4"/>
-          <p:cNvSpPr/>
-          <p:nvPr/>
-        </p:nvSpPr>
-        <p:spPr>
-          <a:xfrm>
-            <a:off x="548640" y="1600200"/>
-            <a:ext cx="11094415" cy="4160520"/>
+      <p:pic>
+        <p:nvPicPr>
+          <p:cNvPr id="5" name="Picture 4" descr="free_05_report_result.png"/>
+          <p:cNvPicPr>
+            <a:picLocks noChangeAspect="1"/>
+          </p:cNvPicPr>
+          <p:nvPr/>
+        </p:nvPicPr>
+        <p:blipFill>
+          <a:blip r:embed="rId2"/>
+          <a:stretch>
+            <a:fillRect/>
+          </a:stretch>
+        </p:blipFill>
+        <p:spPr>
+          <a:xfrm>
+            <a:off x="3070015" y="1600200"/>
+            <a:ext cx="6051665" cy="4160519"/>
           </a:xfrm>
           <a:prstGeom prst="rect">
             <a:avLst/>
           </a:prstGeom>
-          <a:solidFill>
-            <a:srgbClr val="F7F8FA"/>
-          </a:solidFill>
           <a:ln w="9525">
             <a:solidFill>
               <a:srgbClr val="E5E7EB"/>
             </a:solidFill>
           </a:ln>
-          <a:effectLst/>
-        </p:spPr>
-        <p:style>
-          <a:lnRef idx="1">
-            <a:schemeClr val="accent1"/>
-          </a:lnRef>
-          <a:fillRef idx="3">
-            <a:schemeClr val="accent1"/>
-          </a:fillRef>
-          <a:effectRef idx="2">
-            <a:schemeClr val="accent1"/>
-          </a:effectRef>
-          <a:fontRef idx="minor">
-            <a:schemeClr val="lt1"/>
-          </a:fontRef>
-        </p:style>
-        <p:txBody>
-          <a:bodyPr rtlCol="0" anchor="ctr"/>
-          <a:lstStyle/>
-          <a:p>
-            <a:pPr algn="ctr"/>
-          </a:p>
-        </p:txBody>
-      </p:sp>
+        </p:spPr>
+      </p:pic>
       <p:sp>
         <p:nvSpPr>
           <p:cNvPr id="6" name="TextBox 5"/>
@@ -32900,7 +32598,7 @@
         </p:nvSpPr>
         <p:spPr>
           <a:xfrm>
-            <a:off x="548640" y="3154680"/>
+            <a:off x="548640" y="5897880"/>
             <a:ext cx="11094415" cy="457200"/>
           </a:xfrm>
           <a:prstGeom prst="rect">
@@ -32920,13 +32618,13 @@
               </a:lnSpc>
             </a:pPr>
             <a:r>
-              <a:rPr sz="1700" b="1" i="0">
+              <a:rPr sz="1500" b="0" i="0">
                 <a:solidFill>
                   <a:srgbClr val="333333"/>
                 </a:solidFill>
                 <a:latin typeface="Apple SD Gothic Neo"/>
               </a:rPr>
-              <a:t>스크린샷 자리 — assets/screenshots/free_05_report_result.png</a:t>
+              <a:t>보고서 6개 섹션 + 이메일 버전까지 한 번의 요청으로 — 무료 계정 실제 결과</a:t>
             </a:r>
           </a:p>
         </p:txBody>
@@ -32939,8 +32637,8 @@
         </p:nvSpPr>
         <p:spPr>
           <a:xfrm>
-            <a:off x="548640" y="3703320"/>
-            <a:ext cx="11094415" cy="457200"/>
+            <a:off x="548640" y="6492240"/>
+            <a:ext cx="7315200" cy="274320"/>
           </a:xfrm>
           <a:prstGeom prst="rect">
             <a:avLst/>
@@ -32953,7 +32651,7 @@
           </a:bodyPr>
           <a:lstStyle/>
           <a:p>
-            <a:pPr algn="ctr">
+            <a:pPr algn="l">
               <a:lnSpc>
                 <a:spcPct val="115000"/>
               </a:lnSpc>
@@ -32965,7 +32663,7 @@
                 </a:solidFill>
                 <a:latin typeface="Apple SD Gothic Neo"/>
               </a:rPr>
-              <a:t>파일 저장 후 python3 build_pptx/build.py 재실행하면 자동 삽입됩니다</a:t>
+              <a:t>AI 시대의 업무 경쟁력과 생산성 향상 · 2026 청년 여성 밸런스 워크숍</a:t>
             </a:r>
           </a:p>
         </p:txBody>
@@ -32973,84 +32671,6 @@
       <p:sp>
         <p:nvSpPr>
           <p:cNvPr id="8" name="TextBox 7"/>
-          <p:cNvSpPr txBox="1"/>
-          <p:nvPr/>
-        </p:nvSpPr>
-        <p:spPr>
-          <a:xfrm>
-            <a:off x="548640" y="5897880"/>
-            <a:ext cx="11094415" cy="457200"/>
-          </a:xfrm>
-          <a:prstGeom prst="rect">
-            <a:avLst/>
-          </a:prstGeom>
-          <a:noFill/>
-        </p:spPr>
-        <p:txBody>
-          <a:bodyPr wrap="square" lIns="0" rIns="0" tIns="0" bIns="0" anchor="t">
-            <a:spAutoFit/>
-          </a:bodyPr>
-          <a:lstStyle/>
-          <a:p>
-            <a:pPr algn="ctr">
-              <a:lnSpc>
-                <a:spcPct val="115000"/>
-              </a:lnSpc>
-            </a:pPr>
-            <a:r>
-              <a:rPr sz="1500" b="0" i="0">
-                <a:solidFill>
-                  <a:srgbClr val="333333"/>
-                </a:solidFill>
-                <a:latin typeface="Apple SD Gothic Neo"/>
-              </a:rPr>
-              <a:t>보고서 6개 섹션 + 이메일 버전까지 한 번의 요청으로 — 무료 계정 실제 결과</a:t>
-            </a:r>
-          </a:p>
-        </p:txBody>
-      </p:sp>
-      <p:sp>
-        <p:nvSpPr>
-          <p:cNvPr id="9" name="TextBox 8"/>
-          <p:cNvSpPr txBox="1"/>
-          <p:nvPr/>
-        </p:nvSpPr>
-        <p:spPr>
-          <a:xfrm>
-            <a:off x="548640" y="6492240"/>
-            <a:ext cx="7315200" cy="274320"/>
-          </a:xfrm>
-          <a:prstGeom prst="rect">
-            <a:avLst/>
-          </a:prstGeom>
-          <a:noFill/>
-        </p:spPr>
-        <p:txBody>
-          <a:bodyPr wrap="square" lIns="0" rIns="0" tIns="0" bIns="0" anchor="t">
-            <a:spAutoFit/>
-          </a:bodyPr>
-          <a:lstStyle/>
-          <a:p>
-            <a:pPr algn="l">
-              <a:lnSpc>
-                <a:spcPct val="115000"/>
-              </a:lnSpc>
-            </a:pPr>
-            <a:r>
-              <a:rPr sz="1200" b="0" i="0">
-                <a:solidFill>
-                  <a:srgbClr val="333333"/>
-                </a:solidFill>
-                <a:latin typeface="Apple SD Gothic Neo"/>
-              </a:rPr>
-              <a:t>AI 시대의 업무 경쟁력과 생산성 향상 · 2026 청년 여성 밸런스 워크숍</a:t>
-            </a:r>
-          </a:p>
-        </p:txBody>
-      </p:sp>
-      <p:sp>
-        <p:nvSpPr>
-          <p:cNvPr id="10" name="TextBox 9"/>
           <p:cNvSpPr txBox="1"/>
           <p:nvPr/>
         </p:nvSpPr>

--- a/lectures/20260723-worklife-ax-workshop/output/worklife-ax-workshop.pptx
+++ b/lectures/20260723-worklife-ax-workshop/output/worklife-ax-workshop.pptx
@@ -24024,52 +24024,35 @@
           </a:p>
         </p:txBody>
       </p:sp>
-      <p:sp>
-        <p:nvSpPr>
-          <p:cNvPr id="5" name="Rectangle 4"/>
-          <p:cNvSpPr/>
-          <p:nvPr/>
-        </p:nvSpPr>
-        <p:spPr>
-          <a:xfrm>
-            <a:off x="548640" y="1600200"/>
-            <a:ext cx="11094415" cy="4160520"/>
+      <p:pic>
+        <p:nvPicPr>
+          <p:cNvPr id="5" name="Picture 4" descr="free_01_signup.png"/>
+          <p:cNvPicPr>
+            <a:picLocks noChangeAspect="1"/>
+          </p:cNvPicPr>
+          <p:nvPr/>
+        </p:nvPicPr>
+        <p:blipFill>
+          <a:blip r:embed="rId2"/>
+          <a:stretch>
+            <a:fillRect/>
+          </a:stretch>
+        </p:blipFill>
+        <p:spPr>
+          <a:xfrm>
+            <a:off x="2767431" y="1600200"/>
+            <a:ext cx="6656832" cy="4160519"/>
           </a:xfrm>
           <a:prstGeom prst="rect">
             <a:avLst/>
           </a:prstGeom>
-          <a:solidFill>
-            <a:srgbClr val="F7F8FA"/>
-          </a:solidFill>
           <a:ln w="9525">
             <a:solidFill>
               <a:srgbClr val="E5E7EB"/>
             </a:solidFill>
           </a:ln>
-          <a:effectLst/>
-        </p:spPr>
-        <p:style>
-          <a:lnRef idx="1">
-            <a:schemeClr val="accent1"/>
-          </a:lnRef>
-          <a:fillRef idx="3">
-            <a:schemeClr val="accent1"/>
-          </a:fillRef>
-          <a:effectRef idx="2">
-            <a:schemeClr val="accent1"/>
-          </a:effectRef>
-          <a:fontRef idx="minor">
-            <a:schemeClr val="lt1"/>
-          </a:fontRef>
-        </p:style>
-        <p:txBody>
-          <a:bodyPr rtlCol="0" anchor="ctr"/>
-          <a:lstStyle/>
-          <a:p>
-            <a:pPr algn="ctr"/>
-          </a:p>
-        </p:txBody>
-      </p:sp>
+        </p:spPr>
+      </p:pic>
       <p:sp>
         <p:nvSpPr>
           <p:cNvPr id="6" name="TextBox 5"/>
@@ -24078,7 +24061,7 @@
         </p:nvSpPr>
         <p:spPr>
           <a:xfrm>
-            <a:off x="548640" y="3154680"/>
+            <a:off x="548640" y="5897880"/>
             <a:ext cx="11094415" cy="457200"/>
           </a:xfrm>
           <a:prstGeom prst="rect">
@@ -24098,13 +24081,13 @@
               </a:lnSpc>
             </a:pPr>
             <a:r>
-              <a:rPr sz="1700" b="1" i="0">
+              <a:rPr sz="1500" b="0" i="0">
                 <a:solidFill>
                   <a:srgbClr val="333333"/>
                 </a:solidFill>
                 <a:latin typeface="Apple SD Gothic Neo"/>
               </a:rPr>
-              <a:t>스크린샷 자리 — assets/screenshots/free_01_signup.png</a:t>
+              <a:t>claude.ai 접속 → 'Google로 계속하기' 또는 이메일 링크 로그인 — 결제 정보는 필요 없습니다</a:t>
             </a:r>
           </a:p>
         </p:txBody>
@@ -24117,8 +24100,8 @@
         </p:nvSpPr>
         <p:spPr>
           <a:xfrm>
-            <a:off x="548640" y="3703320"/>
-            <a:ext cx="11094415" cy="457200"/>
+            <a:off x="548640" y="6492240"/>
+            <a:ext cx="7315200" cy="274320"/>
           </a:xfrm>
           <a:prstGeom prst="rect">
             <a:avLst/>
@@ -24131,7 +24114,7 @@
           </a:bodyPr>
           <a:lstStyle/>
           <a:p>
-            <a:pPr algn="ctr">
+            <a:pPr algn="l">
               <a:lnSpc>
                 <a:spcPct val="115000"/>
               </a:lnSpc>
@@ -24143,7 +24126,7 @@
                 </a:solidFill>
                 <a:latin typeface="Apple SD Gothic Neo"/>
               </a:rPr>
-              <a:t>파일 저장 후 python3 build_pptx/build.py 재실행하면 자동 삽입됩니다</a:t>
+              <a:t>AI 시대의 업무 경쟁력과 생산성 향상 · 2026 청년 여성 밸런스 워크숍</a:t>
             </a:r>
           </a:p>
         </p:txBody>
@@ -24151,84 +24134,6 @@
       <p:sp>
         <p:nvSpPr>
           <p:cNvPr id="8" name="TextBox 7"/>
-          <p:cNvSpPr txBox="1"/>
-          <p:nvPr/>
-        </p:nvSpPr>
-        <p:spPr>
-          <a:xfrm>
-            <a:off x="548640" y="5897880"/>
-            <a:ext cx="11094415" cy="457200"/>
-          </a:xfrm>
-          <a:prstGeom prst="rect">
-            <a:avLst/>
-          </a:prstGeom>
-          <a:noFill/>
-        </p:spPr>
-        <p:txBody>
-          <a:bodyPr wrap="square" lIns="0" rIns="0" tIns="0" bIns="0" anchor="t">
-            <a:spAutoFit/>
-          </a:bodyPr>
-          <a:lstStyle/>
-          <a:p>
-            <a:pPr algn="ctr">
-              <a:lnSpc>
-                <a:spcPct val="115000"/>
-              </a:lnSpc>
-            </a:pPr>
-            <a:r>
-              <a:rPr sz="1500" b="0" i="0">
-                <a:solidFill>
-                  <a:srgbClr val="333333"/>
-                </a:solidFill>
-                <a:latin typeface="Apple SD Gothic Neo"/>
-              </a:rPr>
-              <a:t>claude.ai 접속 → 'Google로 계속하기' 또는 이메일 링크 로그인 — 결제 정보는 필요 없습니다</a:t>
-            </a:r>
-          </a:p>
-        </p:txBody>
-      </p:sp>
-      <p:sp>
-        <p:nvSpPr>
-          <p:cNvPr id="9" name="TextBox 8"/>
-          <p:cNvSpPr txBox="1"/>
-          <p:nvPr/>
-        </p:nvSpPr>
-        <p:spPr>
-          <a:xfrm>
-            <a:off x="548640" y="6492240"/>
-            <a:ext cx="7315200" cy="274320"/>
-          </a:xfrm>
-          <a:prstGeom prst="rect">
-            <a:avLst/>
-          </a:prstGeom>
-          <a:noFill/>
-        </p:spPr>
-        <p:txBody>
-          <a:bodyPr wrap="square" lIns="0" rIns="0" tIns="0" bIns="0" anchor="t">
-            <a:spAutoFit/>
-          </a:bodyPr>
-          <a:lstStyle/>
-          <a:p>
-            <a:pPr algn="l">
-              <a:lnSpc>
-                <a:spcPct val="115000"/>
-              </a:lnSpc>
-            </a:pPr>
-            <a:r>
-              <a:rPr sz="1200" b="0" i="0">
-                <a:solidFill>
-                  <a:srgbClr val="333333"/>
-                </a:solidFill>
-                <a:latin typeface="Apple SD Gothic Neo"/>
-              </a:rPr>
-              <a:t>AI 시대의 업무 경쟁력과 생산성 향상 · 2026 청년 여성 밸런스 워크숍</a:t>
-            </a:r>
-          </a:p>
-        </p:txBody>
-      </p:sp>
-      <p:sp>
-        <p:nvSpPr>
-          <p:cNvPr id="10" name="TextBox 9"/>
           <p:cNvSpPr txBox="1"/>
           <p:nvPr/>
         </p:nvSpPr>
@@ -27102,52 +27007,35 @@
           </a:p>
         </p:txBody>
       </p:sp>
-      <p:sp>
-        <p:nvSpPr>
-          <p:cNvPr id="5" name="Rectangle 4"/>
-          <p:cNvSpPr/>
-          <p:nvPr/>
-        </p:nvSpPr>
-        <p:spPr>
-          <a:xfrm>
-            <a:off x="548640" y="1600200"/>
-            <a:ext cx="11094415" cy="4160520"/>
+      <p:pic>
+        <p:nvPicPr>
+          <p:cNvPr id="5" name="Picture 4" descr="free_06_usage_limit.png"/>
+          <p:cNvPicPr>
+            <a:picLocks noChangeAspect="1"/>
+          </p:cNvPicPr>
+          <p:nvPr/>
+        </p:nvPicPr>
+        <p:blipFill>
+          <a:blip r:embed="rId2"/>
+          <a:stretch>
+            <a:fillRect/>
+          </a:stretch>
+        </p:blipFill>
+        <p:spPr>
+          <a:xfrm>
+            <a:off x="2767431" y="1600200"/>
+            <a:ext cx="6656832" cy="4160519"/>
           </a:xfrm>
           <a:prstGeom prst="rect">
             <a:avLst/>
           </a:prstGeom>
-          <a:solidFill>
-            <a:srgbClr val="F7F8FA"/>
-          </a:solidFill>
           <a:ln w="9525">
             <a:solidFill>
               <a:srgbClr val="E5E7EB"/>
             </a:solidFill>
           </a:ln>
-          <a:effectLst/>
-        </p:spPr>
-        <p:style>
-          <a:lnRef idx="1">
-            <a:schemeClr val="accent1"/>
-          </a:lnRef>
-          <a:fillRef idx="3">
-            <a:schemeClr val="accent1"/>
-          </a:fillRef>
-          <a:effectRef idx="2">
-            <a:schemeClr val="accent1"/>
-          </a:effectRef>
-          <a:fontRef idx="minor">
-            <a:schemeClr val="lt1"/>
-          </a:fontRef>
-        </p:style>
-        <p:txBody>
-          <a:bodyPr rtlCol="0" anchor="ctr"/>
-          <a:lstStyle/>
-          <a:p>
-            <a:pPr algn="ctr"/>
-          </a:p>
-        </p:txBody>
-      </p:sp>
+        </p:spPr>
+      </p:pic>
       <p:sp>
         <p:nvSpPr>
           <p:cNvPr id="6" name="TextBox 5"/>
@@ -27156,7 +27044,7 @@
         </p:nvSpPr>
         <p:spPr>
           <a:xfrm>
-            <a:off x="548640" y="3154680"/>
+            <a:off x="548640" y="5897880"/>
             <a:ext cx="11094415" cy="457200"/>
           </a:xfrm>
           <a:prstGeom prst="rect">
@@ -27176,13 +27064,13 @@
               </a:lnSpc>
             </a:pPr>
             <a:r>
-              <a:rPr sz="1700" b="1" i="0">
+              <a:rPr sz="1500" b="0" i="0">
                 <a:solidFill>
                   <a:srgbClr val="333333"/>
                 </a:solidFill>
                 <a:latin typeface="Apple SD Gothic Neo"/>
               </a:rPr>
-              <a:t>스크린샷 자리 — assets/screenshots/free_06_usage_limit.png</a:t>
+              <a:t>이 메시지가 떠도 당황하지 않기 — 결과 예시 파일로 이어가고, 휴식 후 재시도하면 됩니다</a:t>
             </a:r>
           </a:p>
         </p:txBody>
@@ -27195,8 +27083,8 @@
         </p:nvSpPr>
         <p:spPr>
           <a:xfrm>
-            <a:off x="548640" y="3703320"/>
-            <a:ext cx="11094415" cy="457200"/>
+            <a:off x="548640" y="6492240"/>
+            <a:ext cx="7315200" cy="274320"/>
           </a:xfrm>
           <a:prstGeom prst="rect">
             <a:avLst/>
@@ -27209,7 +27097,7 @@
           </a:bodyPr>
           <a:lstStyle/>
           <a:p>
-            <a:pPr algn="ctr">
+            <a:pPr algn="l">
               <a:lnSpc>
                 <a:spcPct val="115000"/>
               </a:lnSpc>
@@ -27221,7 +27109,7 @@
                 </a:solidFill>
                 <a:latin typeface="Apple SD Gothic Neo"/>
               </a:rPr>
-              <a:t>파일 저장 후 python3 build_pptx/build.py 재실행하면 자동 삽입됩니다</a:t>
+              <a:t>AI 시대의 업무 경쟁력과 생산성 향상 · 2026 청년 여성 밸런스 워크숍</a:t>
             </a:r>
           </a:p>
         </p:txBody>
@@ -27229,84 +27117,6 @@
       <p:sp>
         <p:nvSpPr>
           <p:cNvPr id="8" name="TextBox 7"/>
-          <p:cNvSpPr txBox="1"/>
-          <p:nvPr/>
-        </p:nvSpPr>
-        <p:spPr>
-          <a:xfrm>
-            <a:off x="548640" y="5897880"/>
-            <a:ext cx="11094415" cy="457200"/>
-          </a:xfrm>
-          <a:prstGeom prst="rect">
-            <a:avLst/>
-          </a:prstGeom>
-          <a:noFill/>
-        </p:spPr>
-        <p:txBody>
-          <a:bodyPr wrap="square" lIns="0" rIns="0" tIns="0" bIns="0" anchor="t">
-            <a:spAutoFit/>
-          </a:bodyPr>
-          <a:lstStyle/>
-          <a:p>
-            <a:pPr algn="ctr">
-              <a:lnSpc>
-                <a:spcPct val="115000"/>
-              </a:lnSpc>
-            </a:pPr>
-            <a:r>
-              <a:rPr sz="1500" b="0" i="0">
-                <a:solidFill>
-                  <a:srgbClr val="333333"/>
-                </a:solidFill>
-                <a:latin typeface="Apple SD Gothic Neo"/>
-              </a:rPr>
-              <a:t>이 메시지가 떠도 당황하지 않기 — 결과 예시 파일로 이어가고, 휴식 후 재시도하면 됩니다</a:t>
-            </a:r>
-          </a:p>
-        </p:txBody>
-      </p:sp>
-      <p:sp>
-        <p:nvSpPr>
-          <p:cNvPr id="9" name="TextBox 8"/>
-          <p:cNvSpPr txBox="1"/>
-          <p:nvPr/>
-        </p:nvSpPr>
-        <p:spPr>
-          <a:xfrm>
-            <a:off x="548640" y="6492240"/>
-            <a:ext cx="7315200" cy="274320"/>
-          </a:xfrm>
-          <a:prstGeom prst="rect">
-            <a:avLst/>
-          </a:prstGeom>
-          <a:noFill/>
-        </p:spPr>
-        <p:txBody>
-          <a:bodyPr wrap="square" lIns="0" rIns="0" tIns="0" bIns="0" anchor="t">
-            <a:spAutoFit/>
-          </a:bodyPr>
-          <a:lstStyle/>
-          <a:p>
-            <a:pPr algn="l">
-              <a:lnSpc>
-                <a:spcPct val="115000"/>
-              </a:lnSpc>
-            </a:pPr>
-            <a:r>
-              <a:rPr sz="1200" b="0" i="0">
-                <a:solidFill>
-                  <a:srgbClr val="333333"/>
-                </a:solidFill>
-                <a:latin typeface="Apple SD Gothic Neo"/>
-              </a:rPr>
-              <a:t>AI 시대의 업무 경쟁력과 생산성 향상 · 2026 청년 여성 밸런스 워크숍</a:t>
-            </a:r>
-          </a:p>
-        </p:txBody>
-      </p:sp>
-      <p:sp>
-        <p:nvSpPr>
-          <p:cNvPr id="10" name="TextBox 9"/>
           <p:cNvSpPr txBox="1"/>
           <p:nvPr/>
         </p:nvSpPr>

--- a/lectures/20260723-worklife-ax-workshop/output/worklife-ax-workshop.pptx
+++ b/lectures/20260723-worklife-ax-workshop/output/worklife-ax-workshop.pptx
@@ -5406,7 +5406,7 @@
                 </a:solidFill>
                 <a:latin typeface="Apple SD Gothic Neo"/>
               </a:rPr>
-              <a:t>라이브 시연이 정상이면 이 슬라이드는 빠르게 넘기고, 실패 시 이 화면으로 대체 설명.</a:t>
+              <a:t>claude.ai(Max 계정) 실제 결과 화면. 라이브 시연 정상이면 빠르게 넘기고, 실패 시 이 화면으로 대체 설명.</a:t>
             </a:r>
           </a:p>
           <a:p/>
@@ -36341,7 +36341,7 @@
                 </a:solidFill>
                 <a:latin typeface="Apple SD Gothic Neo"/>
               </a:rPr>
-              <a:t>Claude for Excel — 실제 화면</a:t>
+              <a:t>표 데이터 분석 — 실제 화면</a:t>
             </a:r>
           </a:p>
         </p:txBody>
@@ -36436,52 +36436,35 @@
           </a:p>
         </p:txBody>
       </p:sp>
-      <p:sp>
-        <p:nvSpPr>
-          <p:cNvPr id="5" name="Rectangle 4"/>
-          <p:cNvSpPr/>
-          <p:nvPr/>
-        </p:nvSpPr>
-        <p:spPr>
-          <a:xfrm>
-            <a:off x="548640" y="1600200"/>
-            <a:ext cx="11094415" cy="4160520"/>
+      <p:pic>
+        <p:nvPicPr>
+          <p:cNvPr id="5" name="Picture 4" descr="paid_01_excel.png"/>
+          <p:cNvPicPr>
+            <a:picLocks noChangeAspect="1"/>
+          </p:cNvPicPr>
+          <p:nvPr/>
+        </p:nvPicPr>
+        <p:blipFill>
+          <a:blip r:embed="rId2"/>
+          <a:stretch>
+            <a:fillRect/>
+          </a:stretch>
+        </p:blipFill>
+        <p:spPr>
+          <a:xfrm>
+            <a:off x="2780332" y="1600200"/>
+            <a:ext cx="6631030" cy="4160520"/>
           </a:xfrm>
           <a:prstGeom prst="rect">
             <a:avLst/>
           </a:prstGeom>
-          <a:solidFill>
-            <a:srgbClr val="F7F8FA"/>
-          </a:solidFill>
           <a:ln w="9525">
             <a:solidFill>
               <a:srgbClr val="E5E7EB"/>
             </a:solidFill>
           </a:ln>
-          <a:effectLst/>
-        </p:spPr>
-        <p:style>
-          <a:lnRef idx="1">
-            <a:schemeClr val="accent1"/>
-          </a:lnRef>
-          <a:fillRef idx="3">
-            <a:schemeClr val="accent1"/>
-          </a:fillRef>
-          <a:effectRef idx="2">
-            <a:schemeClr val="accent1"/>
-          </a:effectRef>
-          <a:fontRef idx="minor">
-            <a:schemeClr val="lt1"/>
-          </a:fontRef>
-        </p:style>
-        <p:txBody>
-          <a:bodyPr rtlCol="0" anchor="ctr"/>
-          <a:lstStyle/>
-          <a:p>
-            <a:pPr algn="ctr"/>
-          </a:p>
-        </p:txBody>
-      </p:sp>
+        </p:spPr>
+      </p:pic>
       <p:sp>
         <p:nvSpPr>
           <p:cNvPr id="6" name="TextBox 5"/>
@@ -36490,7 +36473,7 @@
         </p:nvSpPr>
         <p:spPr>
           <a:xfrm>
-            <a:off x="548640" y="3154680"/>
+            <a:off x="548640" y="5897880"/>
             <a:ext cx="11094415" cy="457200"/>
           </a:xfrm>
           <a:prstGeom prst="rect">
@@ -36510,13 +36493,13 @@
               </a:lnSpc>
             </a:pPr>
             <a:r>
-              <a:rPr sz="1700" b="1" i="0">
+              <a:rPr sz="1500" b="0" i="0">
                 <a:solidFill>
                   <a:srgbClr val="333333"/>
                 </a:solidFill>
                 <a:latin typeface="Apple SD Gothic Neo"/>
               </a:rPr>
-              <a:t>스크린샷 자리 — assets/screenshots/paid_01_excel.png</a:t>
+              <a:t>매출 CSV를 읽고 요약 통계·ROAS·객단가까지 정리한 실제 결과 — Excel 애드인에서는 이 작업이 Excel 창 안에서 일어납니다</a:t>
             </a:r>
           </a:p>
         </p:txBody>
@@ -36529,8 +36512,8 @@
         </p:nvSpPr>
         <p:spPr>
           <a:xfrm>
-            <a:off x="548640" y="3703320"/>
-            <a:ext cx="11094415" cy="457200"/>
+            <a:off x="548640" y="6492240"/>
+            <a:ext cx="7315200" cy="274320"/>
           </a:xfrm>
           <a:prstGeom prst="rect">
             <a:avLst/>
@@ -36543,7 +36526,7 @@
           </a:bodyPr>
           <a:lstStyle/>
           <a:p>
-            <a:pPr algn="ctr">
+            <a:pPr algn="l">
               <a:lnSpc>
                 <a:spcPct val="115000"/>
               </a:lnSpc>
@@ -36555,7 +36538,7 @@
                 </a:solidFill>
                 <a:latin typeface="Apple SD Gothic Neo"/>
               </a:rPr>
-              <a:t>파일 저장 후 python3 build_pptx/build.py 재실행하면 자동 삽입됩니다</a:t>
+              <a:t>AI 시대의 업무 경쟁력과 생산성 향상 · 2026 청년 여성 밸런스 워크숍</a:t>
             </a:r>
           </a:p>
         </p:txBody>
@@ -36563,84 +36546,6 @@
       <p:sp>
         <p:nvSpPr>
           <p:cNvPr id="8" name="TextBox 7"/>
-          <p:cNvSpPr txBox="1"/>
-          <p:nvPr/>
-        </p:nvSpPr>
-        <p:spPr>
-          <a:xfrm>
-            <a:off x="548640" y="5897880"/>
-            <a:ext cx="11094415" cy="457200"/>
-          </a:xfrm>
-          <a:prstGeom prst="rect">
-            <a:avLst/>
-          </a:prstGeom>
-          <a:noFill/>
-        </p:spPr>
-        <p:txBody>
-          <a:bodyPr wrap="square" lIns="0" rIns="0" tIns="0" bIns="0" anchor="t">
-            <a:spAutoFit/>
-          </a:bodyPr>
-          <a:lstStyle/>
-          <a:p>
-            <a:pPr algn="ctr">
-              <a:lnSpc>
-                <a:spcPct val="115000"/>
-              </a:lnSpc>
-            </a:pPr>
-            <a:r>
-              <a:rPr sz="1500" b="0" i="0">
-                <a:solidFill>
-                  <a:srgbClr val="333333"/>
-                </a:solidFill>
-                <a:latin typeface="Apple SD Gothic Neo"/>
-              </a:rPr>
-              <a:t>Excel 창 안에서 Claude가 표를 읽고 계산 열과 인사이트를 추가하는 모습</a:t>
-            </a:r>
-          </a:p>
-        </p:txBody>
-      </p:sp>
-      <p:sp>
-        <p:nvSpPr>
-          <p:cNvPr id="9" name="TextBox 8"/>
-          <p:cNvSpPr txBox="1"/>
-          <p:nvPr/>
-        </p:nvSpPr>
-        <p:spPr>
-          <a:xfrm>
-            <a:off x="548640" y="6492240"/>
-            <a:ext cx="7315200" cy="274320"/>
-          </a:xfrm>
-          <a:prstGeom prst="rect">
-            <a:avLst/>
-          </a:prstGeom>
-          <a:noFill/>
-        </p:spPr>
-        <p:txBody>
-          <a:bodyPr wrap="square" lIns="0" rIns="0" tIns="0" bIns="0" anchor="t">
-            <a:spAutoFit/>
-          </a:bodyPr>
-          <a:lstStyle/>
-          <a:p>
-            <a:pPr algn="l">
-              <a:lnSpc>
-                <a:spcPct val="115000"/>
-              </a:lnSpc>
-            </a:pPr>
-            <a:r>
-              <a:rPr sz="1200" b="0" i="0">
-                <a:solidFill>
-                  <a:srgbClr val="333333"/>
-                </a:solidFill>
-                <a:latin typeface="Apple SD Gothic Neo"/>
-              </a:rPr>
-              <a:t>AI 시대의 업무 경쟁력과 생산성 향상 · 2026 청년 여성 밸런스 워크숍</a:t>
-            </a:r>
-          </a:p>
-        </p:txBody>
-      </p:sp>
-      <p:sp>
-        <p:nvSpPr>
-          <p:cNvPr id="10" name="TextBox 9"/>
           <p:cNvSpPr txBox="1"/>
           <p:nvPr/>
         </p:nvSpPr>
@@ -37355,7 +37260,7 @@
                 </a:solidFill>
                 <a:latin typeface="Apple SD Gothic Neo"/>
               </a:rPr>
-              <a:t>Claude for PowerPoint — 실제 화면</a:t>
+              <a:t>발표자료 구성안 생성 — 실제 화면</a:t>
             </a:r>
           </a:p>
         </p:txBody>
@@ -37450,52 +37355,35 @@
           </a:p>
         </p:txBody>
       </p:sp>
-      <p:sp>
-        <p:nvSpPr>
-          <p:cNvPr id="5" name="Rectangle 4"/>
-          <p:cNvSpPr/>
-          <p:nvPr/>
-        </p:nvSpPr>
-        <p:spPr>
-          <a:xfrm>
-            <a:off x="548640" y="1600200"/>
-            <a:ext cx="11094415" cy="4160520"/>
+      <p:pic>
+        <p:nvPicPr>
+          <p:cNvPr id="5" name="Picture 4" descr="paid_02_ppt.png"/>
+          <p:cNvPicPr>
+            <a:picLocks noChangeAspect="1"/>
+          </p:cNvPicPr>
+          <p:nvPr/>
+        </p:nvPicPr>
+        <p:blipFill>
+          <a:blip r:embed="rId2"/>
+          <a:stretch>
+            <a:fillRect/>
+          </a:stretch>
+        </p:blipFill>
+        <p:spPr>
+          <a:xfrm>
+            <a:off x="2780332" y="1600200"/>
+            <a:ext cx="6631030" cy="4160520"/>
           </a:xfrm>
           <a:prstGeom prst="rect">
             <a:avLst/>
           </a:prstGeom>
-          <a:solidFill>
-            <a:srgbClr val="F7F8FA"/>
-          </a:solidFill>
           <a:ln w="9525">
             <a:solidFill>
               <a:srgbClr val="E5E7EB"/>
             </a:solidFill>
           </a:ln>
-          <a:effectLst/>
-        </p:spPr>
-        <p:style>
-          <a:lnRef idx="1">
-            <a:schemeClr val="accent1"/>
-          </a:lnRef>
-          <a:fillRef idx="3">
-            <a:schemeClr val="accent1"/>
-          </a:fillRef>
-          <a:effectRef idx="2">
-            <a:schemeClr val="accent1"/>
-          </a:effectRef>
-          <a:fontRef idx="minor">
-            <a:schemeClr val="lt1"/>
-          </a:fontRef>
-        </p:style>
-        <p:txBody>
-          <a:bodyPr rtlCol="0" anchor="ctr"/>
-          <a:lstStyle/>
-          <a:p>
-            <a:pPr algn="ctr"/>
-          </a:p>
-        </p:txBody>
-      </p:sp>
+        </p:spPr>
+      </p:pic>
       <p:sp>
         <p:nvSpPr>
           <p:cNvPr id="6" name="TextBox 5"/>
@@ -37504,7 +37392,7 @@
         </p:nvSpPr>
         <p:spPr>
           <a:xfrm>
-            <a:off x="548640" y="3154680"/>
+            <a:off x="548640" y="5897880"/>
             <a:ext cx="11094415" cy="457200"/>
           </a:xfrm>
           <a:prstGeom prst="rect">
@@ -37524,13 +37412,13 @@
               </a:lnSpc>
             </a:pPr>
             <a:r>
-              <a:rPr sz="1700" b="1" i="0">
+              <a:rPr sz="1500" b="0" i="0">
                 <a:solidFill>
                   <a:srgbClr val="333333"/>
                 </a:solidFill>
                 <a:latin typeface="Apple SD Gothic Neo"/>
               </a:rPr>
-              <a:t>스크린샷 자리 — assets/screenshots/paid_02_ppt.png</a:t>
+              <a:t>브리프에서 슬라이드별 제목·핵심 메시지·구성 요소가 생성된 실제 결과 — PowerPoint 애드인에서는 덱에 바로 반영됩니다</a:t>
             </a:r>
           </a:p>
         </p:txBody>
@@ -37543,8 +37431,8 @@
         </p:nvSpPr>
         <p:spPr>
           <a:xfrm>
-            <a:off x="548640" y="3703320"/>
-            <a:ext cx="11094415" cy="457200"/>
+            <a:off x="548640" y="6492240"/>
+            <a:ext cx="7315200" cy="274320"/>
           </a:xfrm>
           <a:prstGeom prst="rect">
             <a:avLst/>
@@ -37557,7 +37445,7 @@
           </a:bodyPr>
           <a:lstStyle/>
           <a:p>
-            <a:pPr algn="ctr">
+            <a:pPr algn="l">
               <a:lnSpc>
                 <a:spcPct val="115000"/>
               </a:lnSpc>
@@ -37569,7 +37457,7 @@
                 </a:solidFill>
                 <a:latin typeface="Apple SD Gothic Neo"/>
               </a:rPr>
-              <a:t>파일 저장 후 python3 build_pptx/build.py 재실행하면 자동 삽입됩니다</a:t>
+              <a:t>AI 시대의 업무 경쟁력과 생산성 향상 · 2026 청년 여성 밸런스 워크숍</a:t>
             </a:r>
           </a:p>
         </p:txBody>
@@ -37577,84 +37465,6 @@
       <p:sp>
         <p:nvSpPr>
           <p:cNvPr id="8" name="TextBox 7"/>
-          <p:cNvSpPr txBox="1"/>
-          <p:nvPr/>
-        </p:nvSpPr>
-        <p:spPr>
-          <a:xfrm>
-            <a:off x="548640" y="5897880"/>
-            <a:ext cx="11094415" cy="457200"/>
-          </a:xfrm>
-          <a:prstGeom prst="rect">
-            <a:avLst/>
-          </a:prstGeom>
-          <a:noFill/>
-        </p:spPr>
-        <p:txBody>
-          <a:bodyPr wrap="square" lIns="0" rIns="0" tIns="0" bIns="0" anchor="t">
-            <a:spAutoFit/>
-          </a:bodyPr>
-          <a:lstStyle/>
-          <a:p>
-            <a:pPr algn="ctr">
-              <a:lnSpc>
-                <a:spcPct val="115000"/>
-              </a:lnSpc>
-            </a:pPr>
-            <a:r>
-              <a:rPr sz="1500" b="0" i="0">
-                <a:solidFill>
-                  <a:srgbClr val="333333"/>
-                </a:solidFill>
-                <a:latin typeface="Apple SD Gothic Neo"/>
-              </a:rPr>
-              <a:t>브리프에서 슬라이드 구성안과 발표자 노트가 생성되는 모습</a:t>
-            </a:r>
-          </a:p>
-        </p:txBody>
-      </p:sp>
-      <p:sp>
-        <p:nvSpPr>
-          <p:cNvPr id="9" name="TextBox 8"/>
-          <p:cNvSpPr txBox="1"/>
-          <p:nvPr/>
-        </p:nvSpPr>
-        <p:spPr>
-          <a:xfrm>
-            <a:off x="548640" y="6492240"/>
-            <a:ext cx="7315200" cy="274320"/>
-          </a:xfrm>
-          <a:prstGeom prst="rect">
-            <a:avLst/>
-          </a:prstGeom>
-          <a:noFill/>
-        </p:spPr>
-        <p:txBody>
-          <a:bodyPr wrap="square" lIns="0" rIns="0" tIns="0" bIns="0" anchor="t">
-            <a:spAutoFit/>
-          </a:bodyPr>
-          <a:lstStyle/>
-          <a:p>
-            <a:pPr algn="l">
-              <a:lnSpc>
-                <a:spcPct val="115000"/>
-              </a:lnSpc>
-            </a:pPr>
-            <a:r>
-              <a:rPr sz="1200" b="0" i="0">
-                <a:solidFill>
-                  <a:srgbClr val="333333"/>
-                </a:solidFill>
-                <a:latin typeface="Apple SD Gothic Neo"/>
-              </a:rPr>
-              <a:t>AI 시대의 업무 경쟁력과 생산성 향상 · 2026 청년 여성 밸런스 워크숍</a:t>
-            </a:r>
-          </a:p>
-        </p:txBody>
-      </p:sp>
-      <p:sp>
-        <p:nvSpPr>
-          <p:cNvPr id="10" name="TextBox 9"/>
           <p:cNvSpPr txBox="1"/>
           <p:nvPr/>
         </p:nvSpPr>
@@ -38337,7 +38147,7 @@
                 </a:solidFill>
                 <a:latin typeface="Apple SD Gothic Neo"/>
               </a:rPr>
-              <a:t>Claude for Word — 실제 화면</a:t>
+              <a:t>보고서 초안 다듬기 — 실제 화면</a:t>
             </a:r>
           </a:p>
         </p:txBody>
@@ -38432,52 +38242,35 @@
           </a:p>
         </p:txBody>
       </p:sp>
-      <p:sp>
-        <p:nvSpPr>
-          <p:cNvPr id="5" name="Rectangle 4"/>
-          <p:cNvSpPr/>
-          <p:nvPr/>
-        </p:nvSpPr>
-        <p:spPr>
-          <a:xfrm>
-            <a:off x="548640" y="1600200"/>
-            <a:ext cx="11094415" cy="4160520"/>
+      <p:pic>
+        <p:nvPicPr>
+          <p:cNvPr id="5" name="Picture 4" descr="paid_03_word.png"/>
+          <p:cNvPicPr>
+            <a:picLocks noChangeAspect="1"/>
+          </p:cNvPicPr>
+          <p:nvPr/>
+        </p:nvPicPr>
+        <p:blipFill>
+          <a:blip r:embed="rId2"/>
+          <a:stretch>
+            <a:fillRect/>
+          </a:stretch>
+        </p:blipFill>
+        <p:spPr>
+          <a:xfrm>
+            <a:off x="2780332" y="1600200"/>
+            <a:ext cx="6631030" cy="4160520"/>
           </a:xfrm>
           <a:prstGeom prst="rect">
             <a:avLst/>
           </a:prstGeom>
-          <a:solidFill>
-            <a:srgbClr val="F7F8FA"/>
-          </a:solidFill>
           <a:ln w="9525">
             <a:solidFill>
               <a:srgbClr val="E5E7EB"/>
             </a:solidFill>
           </a:ln>
-          <a:effectLst/>
-        </p:spPr>
-        <p:style>
-          <a:lnRef idx="1">
-            <a:schemeClr val="accent1"/>
-          </a:lnRef>
-          <a:fillRef idx="3">
-            <a:schemeClr val="accent1"/>
-          </a:fillRef>
-          <a:effectRef idx="2">
-            <a:schemeClr val="accent1"/>
-          </a:effectRef>
-          <a:fontRef idx="minor">
-            <a:schemeClr val="lt1"/>
-          </a:fontRef>
-        </p:style>
-        <p:txBody>
-          <a:bodyPr rtlCol="0" anchor="ctr"/>
-          <a:lstStyle/>
-          <a:p>
-            <a:pPr algn="ctr"/>
-          </a:p>
-        </p:txBody>
-      </p:sp>
+        </p:spPr>
+      </p:pic>
       <p:sp>
         <p:nvSpPr>
           <p:cNvPr id="6" name="TextBox 5"/>
@@ -38486,7 +38279,7 @@
         </p:nvSpPr>
         <p:spPr>
           <a:xfrm>
-            <a:off x="548640" y="3154680"/>
+            <a:off x="548640" y="5897880"/>
             <a:ext cx="11094415" cy="457200"/>
           </a:xfrm>
           <a:prstGeom prst="rect">
@@ -38506,13 +38299,13 @@
               </a:lnSpc>
             </a:pPr>
             <a:r>
-              <a:rPr sz="1700" b="1" i="0">
+              <a:rPr sz="1500" b="0" i="0">
                 <a:solidFill>
                   <a:srgbClr val="333333"/>
                 </a:solidFill>
                 <a:latin typeface="Apple SD Gothic Neo"/>
               </a:rPr>
-              <a:t>스크린샷 자리 — assets/screenshots/paid_03_word.png</a:t>
+              <a:t>구어체 초안이 격식 있는 결과보고서 문서로 재구성된 실제 결과 — Word 애드인에서는 문서 안에서 직접 수정됩니다</a:t>
             </a:r>
           </a:p>
         </p:txBody>
@@ -38525,8 +38318,8 @@
         </p:nvSpPr>
         <p:spPr>
           <a:xfrm>
-            <a:off x="548640" y="3703320"/>
-            <a:ext cx="11094415" cy="457200"/>
+            <a:off x="548640" y="6492240"/>
+            <a:ext cx="7315200" cy="274320"/>
           </a:xfrm>
           <a:prstGeom prst="rect">
             <a:avLst/>
@@ -38539,7 +38332,7 @@
           </a:bodyPr>
           <a:lstStyle/>
           <a:p>
-            <a:pPr algn="ctr">
+            <a:pPr algn="l">
               <a:lnSpc>
                 <a:spcPct val="115000"/>
               </a:lnSpc>
@@ -38551,7 +38344,7 @@
                 </a:solidFill>
                 <a:latin typeface="Apple SD Gothic Neo"/>
               </a:rPr>
-              <a:t>파일 저장 후 python3 build_pptx/build.py 재실행하면 자동 삽입됩니다</a:t>
+              <a:t>AI 시대의 업무 경쟁력과 생산성 향상 · 2026 청년 여성 밸런스 워크숍</a:t>
             </a:r>
           </a:p>
         </p:txBody>
@@ -38559,84 +38352,6 @@
       <p:sp>
         <p:nvSpPr>
           <p:cNvPr id="8" name="TextBox 7"/>
-          <p:cNvSpPr txBox="1"/>
-          <p:nvPr/>
-        </p:nvSpPr>
-        <p:spPr>
-          <a:xfrm>
-            <a:off x="548640" y="5897880"/>
-            <a:ext cx="11094415" cy="457200"/>
-          </a:xfrm>
-          <a:prstGeom prst="rect">
-            <a:avLst/>
-          </a:prstGeom>
-          <a:noFill/>
-        </p:spPr>
-        <p:txBody>
-          <a:bodyPr wrap="square" lIns="0" rIns="0" tIns="0" bIns="0" anchor="t">
-            <a:spAutoFit/>
-          </a:bodyPr>
-          <a:lstStyle/>
-          <a:p>
-            <a:pPr algn="ctr">
-              <a:lnSpc>
-                <a:spcPct val="115000"/>
-              </a:lnSpc>
-            </a:pPr>
-            <a:r>
-              <a:rPr sz="1500" b="0" i="0">
-                <a:solidFill>
-                  <a:srgbClr val="333333"/>
-                </a:solidFill>
-                <a:latin typeface="Apple SD Gothic Neo"/>
-              </a:rPr>
-              <a:t>Word 문서 안에서 초안을 다듬고 확인 질문을 뽑아주는 모습</a:t>
-            </a:r>
-          </a:p>
-        </p:txBody>
-      </p:sp>
-      <p:sp>
-        <p:nvSpPr>
-          <p:cNvPr id="9" name="TextBox 8"/>
-          <p:cNvSpPr txBox="1"/>
-          <p:nvPr/>
-        </p:nvSpPr>
-        <p:spPr>
-          <a:xfrm>
-            <a:off x="548640" y="6492240"/>
-            <a:ext cx="7315200" cy="274320"/>
-          </a:xfrm>
-          <a:prstGeom prst="rect">
-            <a:avLst/>
-          </a:prstGeom>
-          <a:noFill/>
-        </p:spPr>
-        <p:txBody>
-          <a:bodyPr wrap="square" lIns="0" rIns="0" tIns="0" bIns="0" anchor="t">
-            <a:spAutoFit/>
-          </a:bodyPr>
-          <a:lstStyle/>
-          <a:p>
-            <a:pPr algn="l">
-              <a:lnSpc>
-                <a:spcPct val="115000"/>
-              </a:lnSpc>
-            </a:pPr>
-            <a:r>
-              <a:rPr sz="1200" b="0" i="0">
-                <a:solidFill>
-                  <a:srgbClr val="333333"/>
-                </a:solidFill>
-                <a:latin typeface="Apple SD Gothic Neo"/>
-              </a:rPr>
-              <a:t>AI 시대의 업무 경쟁력과 생산성 향상 · 2026 청년 여성 밸런스 워크숍</a:t>
-            </a:r>
-          </a:p>
-        </p:txBody>
-      </p:sp>
-      <p:sp>
-        <p:nvSpPr>
-          <p:cNvPr id="10" name="TextBox 9"/>
           <p:cNvSpPr txBox="1"/>
           <p:nvPr/>
         </p:nvSpPr>
@@ -39444,52 +39159,35 @@
           </a:p>
         </p:txBody>
       </p:sp>
-      <p:sp>
-        <p:nvSpPr>
-          <p:cNvPr id="5" name="Rectangle 4"/>
-          <p:cNvSpPr/>
-          <p:nvPr/>
-        </p:nvSpPr>
-        <p:spPr>
-          <a:xfrm>
-            <a:off x="548640" y="1600200"/>
-            <a:ext cx="11094415" cy="4160520"/>
+      <p:pic>
+        <p:nvPicPr>
+          <p:cNvPr id="5" name="Picture 4" descr="paid_04_mcp.png"/>
+          <p:cNvPicPr>
+            <a:picLocks noChangeAspect="1"/>
+          </p:cNvPicPr>
+          <p:nvPr/>
+        </p:nvPicPr>
+        <p:blipFill>
+          <a:blip r:embed="rId2"/>
+          <a:stretch>
+            <a:fillRect/>
+          </a:stretch>
+        </p:blipFill>
+        <p:spPr>
+          <a:xfrm>
+            <a:off x="2780332" y="1600200"/>
+            <a:ext cx="6631030" cy="4160520"/>
           </a:xfrm>
           <a:prstGeom prst="rect">
             <a:avLst/>
           </a:prstGeom>
-          <a:solidFill>
-            <a:srgbClr val="F7F8FA"/>
-          </a:solidFill>
           <a:ln w="9525">
             <a:solidFill>
               <a:srgbClr val="E5E7EB"/>
             </a:solidFill>
           </a:ln>
-          <a:effectLst/>
-        </p:spPr>
-        <p:style>
-          <a:lnRef idx="1">
-            <a:schemeClr val="accent1"/>
-          </a:lnRef>
-          <a:fillRef idx="3">
-            <a:schemeClr val="accent1"/>
-          </a:fillRef>
-          <a:effectRef idx="2">
-            <a:schemeClr val="accent1"/>
-          </a:effectRef>
-          <a:fontRef idx="minor">
-            <a:schemeClr val="lt1"/>
-          </a:fontRef>
-        </p:style>
-        <p:txBody>
-          <a:bodyPr rtlCol="0" anchor="ctr"/>
-          <a:lstStyle/>
-          <a:p>
-            <a:pPr algn="ctr"/>
-          </a:p>
-        </p:txBody>
-      </p:sp>
+        </p:spPr>
+      </p:pic>
       <p:sp>
         <p:nvSpPr>
           <p:cNvPr id="6" name="TextBox 5"/>
@@ -39498,7 +39196,7 @@
         </p:nvSpPr>
         <p:spPr>
           <a:xfrm>
-            <a:off x="548640" y="3154680"/>
+            <a:off x="548640" y="5897880"/>
             <a:ext cx="11094415" cy="457200"/>
           </a:xfrm>
           <a:prstGeom prst="rect">
@@ -39518,13 +39216,13 @@
               </a:lnSpc>
             </a:pPr>
             <a:r>
-              <a:rPr sz="1700" b="1" i="0">
+              <a:rPr sz="1500" b="0" i="0">
                 <a:solidFill>
                   <a:srgbClr val="333333"/>
                 </a:solidFill>
                 <a:latin typeface="Apple SD Gothic Neo"/>
               </a:rPr>
-              <a:t>스크린샷 자리 — assets/screenshots/paid_04_mcp.png</a:t>
+              <a:t>Claude 설정의 커넥터 목록 — Gmail·캘린더·Notion·Drive 등 업무 도구가 연결되는 실제 화면</a:t>
             </a:r>
           </a:p>
         </p:txBody>
@@ -39537,8 +39235,8 @@
         </p:nvSpPr>
         <p:spPr>
           <a:xfrm>
-            <a:off x="548640" y="3703320"/>
-            <a:ext cx="11094415" cy="457200"/>
+            <a:off x="548640" y="6492240"/>
+            <a:ext cx="7315200" cy="274320"/>
           </a:xfrm>
           <a:prstGeom prst="rect">
             <a:avLst/>
@@ -39551,7 +39249,7 @@
           </a:bodyPr>
           <a:lstStyle/>
           <a:p>
-            <a:pPr algn="ctr">
+            <a:pPr algn="l">
               <a:lnSpc>
                 <a:spcPct val="115000"/>
               </a:lnSpc>
@@ -39563,7 +39261,7 @@
                 </a:solidFill>
                 <a:latin typeface="Apple SD Gothic Neo"/>
               </a:rPr>
-              <a:t>파일 저장 후 python3 build_pptx/build.py 재실행하면 자동 삽입됩니다</a:t>
+              <a:t>AI 시대의 업무 경쟁력과 생산성 향상 · 2026 청년 여성 밸런스 워크숍</a:t>
             </a:r>
           </a:p>
         </p:txBody>
@@ -39571,84 +39269,6 @@
       <p:sp>
         <p:nvSpPr>
           <p:cNvPr id="8" name="TextBox 7"/>
-          <p:cNvSpPr txBox="1"/>
-          <p:nvPr/>
-        </p:nvSpPr>
-        <p:spPr>
-          <a:xfrm>
-            <a:off x="548640" y="5897880"/>
-            <a:ext cx="11094415" cy="457200"/>
-          </a:xfrm>
-          <a:prstGeom prst="rect">
-            <a:avLst/>
-          </a:prstGeom>
-          <a:noFill/>
-        </p:spPr>
-        <p:txBody>
-          <a:bodyPr wrap="square" lIns="0" rIns="0" tIns="0" bIns="0" anchor="t">
-            <a:spAutoFit/>
-          </a:bodyPr>
-          <a:lstStyle/>
-          <a:p>
-            <a:pPr algn="ctr">
-              <a:lnSpc>
-                <a:spcPct val="115000"/>
-              </a:lnSpc>
-            </a:pPr>
-            <a:r>
-              <a:rPr sz="1500" b="0" i="0">
-                <a:solidFill>
-                  <a:srgbClr val="333333"/>
-                </a:solidFill>
-                <a:latin typeface="Apple SD Gothic Neo"/>
-              </a:rPr>
-              <a:t>Claude 설정의 커넥터 목록 — Drive·Notion 등 업무 도구가 연결된 모습</a:t>
-            </a:r>
-          </a:p>
-        </p:txBody>
-      </p:sp>
-      <p:sp>
-        <p:nvSpPr>
-          <p:cNvPr id="9" name="TextBox 8"/>
-          <p:cNvSpPr txBox="1"/>
-          <p:nvPr/>
-        </p:nvSpPr>
-        <p:spPr>
-          <a:xfrm>
-            <a:off x="548640" y="6492240"/>
-            <a:ext cx="7315200" cy="274320"/>
-          </a:xfrm>
-          <a:prstGeom prst="rect">
-            <a:avLst/>
-          </a:prstGeom>
-          <a:noFill/>
-        </p:spPr>
-        <p:txBody>
-          <a:bodyPr wrap="square" lIns="0" rIns="0" tIns="0" bIns="0" anchor="t">
-            <a:spAutoFit/>
-          </a:bodyPr>
-          <a:lstStyle/>
-          <a:p>
-            <a:pPr algn="l">
-              <a:lnSpc>
-                <a:spcPct val="115000"/>
-              </a:lnSpc>
-            </a:pPr>
-            <a:r>
-              <a:rPr sz="1200" b="0" i="0">
-                <a:solidFill>
-                  <a:srgbClr val="333333"/>
-                </a:solidFill>
-                <a:latin typeface="Apple SD Gothic Neo"/>
-              </a:rPr>
-              <a:t>AI 시대의 업무 경쟁력과 생산성 향상 · 2026 청년 여성 밸런스 워크숍</a:t>
-            </a:r>
-          </a:p>
-        </p:txBody>
-      </p:sp>
-      <p:sp>
-        <p:nvSpPr>
-          <p:cNvPr id="10" name="TextBox 9"/>
           <p:cNvSpPr txBox="1"/>
           <p:nvPr/>
         </p:nvSpPr>
@@ -40410,52 +40030,35 @@
           </a:p>
         </p:txBody>
       </p:sp>
-      <p:sp>
-        <p:nvSpPr>
-          <p:cNvPr id="5" name="Rectangle 4"/>
-          <p:cNvSpPr/>
-          <p:nvPr/>
-        </p:nvSpPr>
-        <p:spPr>
-          <a:xfrm>
-            <a:off x="548640" y="1600200"/>
-            <a:ext cx="11094415" cy="4160520"/>
+      <p:pic>
+        <p:nvPicPr>
+          <p:cNvPr id="5" name="Picture 4" descr="paid_05_skills.png"/>
+          <p:cNvPicPr>
+            <a:picLocks noChangeAspect="1"/>
+          </p:cNvPicPr>
+          <p:nvPr/>
+        </p:nvPicPr>
+        <p:blipFill>
+          <a:blip r:embed="rId2"/>
+          <a:stretch>
+            <a:fillRect/>
+          </a:stretch>
+        </p:blipFill>
+        <p:spPr>
+          <a:xfrm>
+            <a:off x="2780332" y="1600200"/>
+            <a:ext cx="6631030" cy="4160520"/>
           </a:xfrm>
           <a:prstGeom prst="rect">
             <a:avLst/>
           </a:prstGeom>
-          <a:solidFill>
-            <a:srgbClr val="F7F8FA"/>
-          </a:solidFill>
           <a:ln w="9525">
             <a:solidFill>
               <a:srgbClr val="E5E7EB"/>
             </a:solidFill>
           </a:ln>
-          <a:effectLst/>
-        </p:spPr>
-        <p:style>
-          <a:lnRef idx="1">
-            <a:schemeClr val="accent1"/>
-          </a:lnRef>
-          <a:fillRef idx="3">
-            <a:schemeClr val="accent1"/>
-          </a:fillRef>
-          <a:effectRef idx="2">
-            <a:schemeClr val="accent1"/>
-          </a:effectRef>
-          <a:fontRef idx="minor">
-            <a:schemeClr val="lt1"/>
-          </a:fontRef>
-        </p:style>
-        <p:txBody>
-          <a:bodyPr rtlCol="0" anchor="ctr"/>
-          <a:lstStyle/>
-          <a:p>
-            <a:pPr algn="ctr"/>
-          </a:p>
-        </p:txBody>
-      </p:sp>
+        </p:spPr>
+      </p:pic>
       <p:sp>
         <p:nvSpPr>
           <p:cNvPr id="6" name="TextBox 5"/>
@@ -40464,7 +40067,7 @@
         </p:nvSpPr>
         <p:spPr>
           <a:xfrm>
-            <a:off x="548640" y="3154680"/>
+            <a:off x="548640" y="5897880"/>
             <a:ext cx="11094415" cy="457200"/>
           </a:xfrm>
           <a:prstGeom prst="rect">
@@ -40484,13 +40087,13 @@
               </a:lnSpc>
             </a:pPr>
             <a:r>
-              <a:rPr sz="1700" b="1" i="0">
+              <a:rPr sz="1500" b="0" i="0">
                 <a:solidFill>
                   <a:srgbClr val="333333"/>
                 </a:solidFill>
                 <a:latin typeface="Apple SD Gothic Neo"/>
               </a:rPr>
-              <a:t>스크린샷 자리 — assets/screenshots/paid_05_skills.png</a:t>
+              <a:t>계정에 설치된 Skill 목록 — 프롬프트 노하우가 재사용 가능한 자산이 되는 시작점</a:t>
             </a:r>
           </a:p>
         </p:txBody>
@@ -40503,8 +40106,8 @@
         </p:nvSpPr>
         <p:spPr>
           <a:xfrm>
-            <a:off x="548640" y="3703320"/>
-            <a:ext cx="11094415" cy="457200"/>
+            <a:off x="548640" y="6492240"/>
+            <a:ext cx="7315200" cy="274320"/>
           </a:xfrm>
           <a:prstGeom prst="rect">
             <a:avLst/>
@@ -40517,7 +40120,7 @@
           </a:bodyPr>
           <a:lstStyle/>
           <a:p>
-            <a:pPr algn="ctr">
+            <a:pPr algn="l">
               <a:lnSpc>
                 <a:spcPct val="115000"/>
               </a:lnSpc>
@@ -40529,7 +40132,7 @@
                 </a:solidFill>
                 <a:latin typeface="Apple SD Gothic Neo"/>
               </a:rPr>
-              <a:t>파일 저장 후 python3 build_pptx/build.py 재실행하면 자동 삽입됩니다</a:t>
+              <a:t>AI 시대의 업무 경쟁력과 생산성 향상 · 2026 청년 여성 밸런스 워크숍</a:t>
             </a:r>
           </a:p>
         </p:txBody>
@@ -40537,84 +40140,6 @@
       <p:sp>
         <p:nvSpPr>
           <p:cNvPr id="8" name="TextBox 7"/>
-          <p:cNvSpPr txBox="1"/>
-          <p:nvPr/>
-        </p:nvSpPr>
-        <p:spPr>
-          <a:xfrm>
-            <a:off x="548640" y="5897880"/>
-            <a:ext cx="11094415" cy="457200"/>
-          </a:xfrm>
-          <a:prstGeom prst="rect">
-            <a:avLst/>
-          </a:prstGeom>
-          <a:noFill/>
-        </p:spPr>
-        <p:txBody>
-          <a:bodyPr wrap="square" lIns="0" rIns="0" tIns="0" bIns="0" anchor="t">
-            <a:spAutoFit/>
-          </a:bodyPr>
-          <a:lstStyle/>
-          <a:p>
-            <a:pPr algn="ctr">
-              <a:lnSpc>
-                <a:spcPct val="115000"/>
-              </a:lnSpc>
-            </a:pPr>
-            <a:r>
-              <a:rPr sz="1500" b="0" i="0">
-                <a:solidFill>
-                  <a:srgbClr val="333333"/>
-                </a:solidFill>
-                <a:latin typeface="Apple SD Gothic Neo"/>
-              </a:rPr>
-              <a:t>저장된 Skill 목록과 실행 화면 — 반복 업무 방식이 자산이 되는 모습</a:t>
-            </a:r>
-          </a:p>
-        </p:txBody>
-      </p:sp>
-      <p:sp>
-        <p:nvSpPr>
-          <p:cNvPr id="9" name="TextBox 8"/>
-          <p:cNvSpPr txBox="1"/>
-          <p:nvPr/>
-        </p:nvSpPr>
-        <p:spPr>
-          <a:xfrm>
-            <a:off x="548640" y="6492240"/>
-            <a:ext cx="7315200" cy="274320"/>
-          </a:xfrm>
-          <a:prstGeom prst="rect">
-            <a:avLst/>
-          </a:prstGeom>
-          <a:noFill/>
-        </p:spPr>
-        <p:txBody>
-          <a:bodyPr wrap="square" lIns="0" rIns="0" tIns="0" bIns="0" anchor="t">
-            <a:spAutoFit/>
-          </a:bodyPr>
-          <a:lstStyle/>
-          <a:p>
-            <a:pPr algn="l">
-              <a:lnSpc>
-                <a:spcPct val="115000"/>
-              </a:lnSpc>
-            </a:pPr>
-            <a:r>
-              <a:rPr sz="1200" b="0" i="0">
-                <a:solidFill>
-                  <a:srgbClr val="333333"/>
-                </a:solidFill>
-                <a:latin typeface="Apple SD Gothic Neo"/>
-              </a:rPr>
-              <a:t>AI 시대의 업무 경쟁력과 생산성 향상 · 2026 청년 여성 밸런스 워크숍</a:t>
-            </a:r>
-          </a:p>
-        </p:txBody>
-      </p:sp>
-      <p:sp>
-        <p:nvSpPr>
-          <p:cNvPr id="10" name="TextBox 9"/>
           <p:cNvSpPr txBox="1"/>
           <p:nvPr/>
         </p:nvSpPr>
